--- a/output_pptx/I_Stand_Amazed_How_Marvelous.pptx
+++ b/output_pptx/I_Stand_Amazed_How_Marvelous.pptx
@@ -3114,8 +3114,8 @@
         </p:nvSpPr>
         <p:spPr>
           <a:xfrm>
-            <a:off x="594360" y="1837944"/>
-            <a:ext cx="11002975" cy="685800"/>
+            <a:off x="640080" y="1650492"/>
+            <a:ext cx="10911535" cy="731520"/>
           </a:xfrm>
           <a:prstGeom prst="rect">
             <a:avLst/>
@@ -3130,7 +3130,7 @@
           <a:p>
             <a:pPr algn="ctr"/>
             <a:r>
-              <a:rPr sz="4400" b="1" i="0">
+              <a:rPr sz="4800" b="1" i="0">
                 <a:solidFill>
                   <a:srgbClr val="FFFFFF"/>
                 </a:solidFill>
@@ -3149,8 +3149,8 @@
         </p:nvSpPr>
         <p:spPr>
           <a:xfrm>
-            <a:off x="594360" y="2560320"/>
-            <a:ext cx="11002975" cy="384048"/>
+            <a:off x="640080" y="2418588"/>
+            <a:ext cx="10911535" cy="365760"/>
           </a:xfrm>
           <a:prstGeom prst="rect">
             <a:avLst/>
@@ -3167,7 +3167,7 @@
             <a:r>
               <a:rPr sz="2400" b="0" i="1">
                 <a:solidFill>
-                  <a:srgbClr val="B4B4B4"/>
+                  <a:srgbClr val="AAAAAA"/>
                 </a:solidFill>
                 <a:latin typeface="Arial"/>
               </a:rPr>
@@ -3184,8 +3184,8 @@
         </p:nvSpPr>
         <p:spPr>
           <a:xfrm>
-            <a:off x="594360" y="2980944"/>
-            <a:ext cx="11002975" cy="347472"/>
+            <a:off x="640080" y="2985516"/>
+            <a:ext cx="10911535" cy="731520"/>
           </a:xfrm>
           <a:prstGeom prst="rect">
             <a:avLst/>
@@ -3200,13 +3200,13 @@
           <a:p>
             <a:pPr algn="ctr"/>
             <a:r>
-              <a:rPr sz="2000" b="0" i="1">
-                <a:solidFill>
-                  <a:srgbClr val="8C8C8C"/>
+              <a:rPr sz="4800" b="1" i="0">
+                <a:solidFill>
+                  <a:srgbClr val="FFFFFF"/>
                 </a:solidFill>
                 <a:latin typeface="Arial"/>
               </a:rPr>
-              <a:t/>
+              <a:t>なぜ罪で汚れたこの身に愛-を</a:t>
             </a:r>
           </a:p>
         </p:txBody>
@@ -3219,8 +3219,8 @@
         </p:nvSpPr>
         <p:spPr>
           <a:xfrm>
-            <a:off x="594360" y="3529584"/>
-            <a:ext cx="11002975" cy="685800"/>
+            <a:off x="640080" y="3753612"/>
+            <a:ext cx="10911535" cy="365760"/>
           </a:xfrm>
           <a:prstGeom prst="rect">
             <a:avLst/>
@@ -3235,13 +3235,13 @@
           <a:p>
             <a:pPr algn="ctr"/>
             <a:r>
-              <a:rPr sz="4400" b="1" i="0">
-                <a:solidFill>
-                  <a:srgbClr val="FFFFFF"/>
+              <a:rPr sz="2400" b="0" i="1">
+                <a:solidFill>
+                  <a:srgbClr val="AAAAAA"/>
                 </a:solidFill>
                 <a:latin typeface="Arial"/>
               </a:rPr>
-              <a:t>なぜ罪で汚れたこの身に愛-を</a:t>
+              <a:t>naze tsumi de kegareta kono mi ni ai wo</a:t>
             </a:r>
           </a:p>
         </p:txBody>
@@ -3254,8 +3254,8 @@
         </p:nvSpPr>
         <p:spPr>
           <a:xfrm>
-            <a:off x="594360" y="4251960"/>
-            <a:ext cx="11002975" cy="384048"/>
+            <a:off x="640080" y="4530852"/>
+            <a:ext cx="10911535" cy="310896"/>
           </a:xfrm>
           <a:prstGeom prst="rect">
             <a:avLst/>
@@ -3270,13 +3270,13 @@
           <a:p>
             <a:pPr algn="ctr"/>
             <a:r>
-              <a:rPr sz="2400" b="0" i="1">
-                <a:solidFill>
-                  <a:srgbClr val="B4B4B4"/>
+              <a:rPr sz="2000" b="0" i="1">
+                <a:solidFill>
+                  <a:srgbClr val="828282"/>
                 </a:solidFill>
                 <a:latin typeface="Arial"/>
               </a:rPr>
-              <a:t>naze tsumi de kegareta kono mi ni ai wo</a:t>
+              <a:t>Ó Quão Maravilhoso</a:t>
             </a:r>
           </a:p>
         </p:txBody>
@@ -3289,8 +3289,8 @@
         </p:nvSpPr>
         <p:spPr>
           <a:xfrm>
-            <a:off x="594360" y="4672584"/>
-            <a:ext cx="11002975" cy="347472"/>
+            <a:off x="640080" y="4896612"/>
+            <a:ext cx="10911535" cy="310896"/>
           </a:xfrm>
           <a:prstGeom prst="rect">
             <a:avLst/>
@@ -3307,11 +3307,11 @@
             <a:r>
               <a:rPr sz="2000" b="0" i="1">
                 <a:solidFill>
-                  <a:srgbClr val="8C8C8C"/>
+                  <a:srgbClr val="828282"/>
                 </a:solidFill>
                 <a:latin typeface="Arial"/>
               </a:rPr>
-              <a:t/>
+              <a:t>Estou maravilhado com a presença</a:t>
             </a:r>
           </a:p>
         </p:txBody>
@@ -3350,8 +3350,8 @@
         </p:nvSpPr>
         <p:spPr>
           <a:xfrm>
-            <a:off x="594360" y="2258568"/>
-            <a:ext cx="11002975" cy="685800"/>
+            <a:off x="640080" y="2052828"/>
+            <a:ext cx="10911535" cy="731520"/>
           </a:xfrm>
           <a:prstGeom prst="rect">
             <a:avLst/>
@@ -3366,7 +3366,7 @@
           <a:p>
             <a:pPr algn="ctr"/>
             <a:r>
-              <a:rPr sz="4400" b="1" i="0">
+              <a:rPr sz="4800" b="1" i="0">
                 <a:solidFill>
                   <a:srgbClr val="FFFFFF"/>
                 </a:solidFill>
@@ -3385,8 +3385,8 @@
         </p:nvSpPr>
         <p:spPr>
           <a:xfrm>
-            <a:off x="594360" y="2980944"/>
-            <a:ext cx="11002975" cy="347472"/>
+            <a:off x="640080" y="2985516"/>
+            <a:ext cx="10911535" cy="731520"/>
           </a:xfrm>
           <a:prstGeom prst="rect">
             <a:avLst/>
@@ -3401,13 +3401,13 @@
           <a:p>
             <a:pPr algn="ctr"/>
             <a:r>
-              <a:rPr sz="2200" b="0" i="1">
-                <a:solidFill>
-                  <a:srgbClr val="8C8C8C"/>
+              <a:rPr sz="4100" b="1" i="0">
+                <a:solidFill>
+                  <a:srgbClr val="FFFFFF"/>
                 </a:solidFill>
                 <a:latin typeface="Arial"/>
               </a:rPr>
-              <a:t/>
+              <a:t>Ó quão maravilhoso! Ó quão admirável!</a:t>
             </a:r>
           </a:p>
         </p:txBody>
@@ -3420,8 +3420,8 @@
         </p:nvSpPr>
         <p:spPr>
           <a:xfrm>
-            <a:off x="594360" y="3529584"/>
-            <a:ext cx="11002975" cy="685800"/>
+            <a:off x="640080" y="4128516"/>
+            <a:ext cx="10911535" cy="310896"/>
           </a:xfrm>
           <a:prstGeom prst="rect">
             <a:avLst/>
@@ -3436,13 +3436,13 @@
           <a:p>
             <a:pPr algn="ctr"/>
             <a:r>
-              <a:rPr sz="3805" b="1" i="0">
-                <a:solidFill>
-                  <a:srgbClr val="FFFFFF"/>
+              <a:rPr sz="2000" b="0" i="0">
+                <a:solidFill>
+                  <a:srgbClr val="828282"/>
                 </a:solidFill>
                 <a:latin typeface="Arial"/>
               </a:rPr>
-              <a:t>Ó quão maravilhoso! Ó quão admirável!</a:t>
+              <a:t>ああ歌い続けよう 主イエスの愛を</a:t>
             </a:r>
           </a:p>
         </p:txBody>
@@ -3455,8 +3455,8 @@
         </p:nvSpPr>
         <p:spPr>
           <a:xfrm>
-            <a:off x="594360" y="4251960"/>
-            <a:ext cx="11002975" cy="347472"/>
+            <a:off x="640080" y="4494276"/>
+            <a:ext cx="10911535" cy="310896"/>
           </a:xfrm>
           <a:prstGeom prst="rect">
             <a:avLst/>
@@ -3471,13 +3471,13 @@
           <a:p>
             <a:pPr algn="ctr"/>
             <a:r>
-              <a:rPr sz="2200" b="0" i="1">
-                <a:solidFill>
-                  <a:srgbClr val="8C8C8C"/>
+              <a:rPr sz="2000" b="0" i="0">
+                <a:solidFill>
+                  <a:srgbClr val="828282"/>
                 </a:solidFill>
                 <a:latin typeface="Arial"/>
               </a:rPr>
-              <a:t/>
+              <a:t>喜-び-歌おう すばらしい 主- の - あい</a:t>
             </a:r>
           </a:p>
         </p:txBody>
@@ -3516,8 +3516,8 @@
         </p:nvSpPr>
         <p:spPr>
           <a:xfrm>
-            <a:off x="594360" y="2258568"/>
-            <a:ext cx="11002975" cy="685800"/>
+            <a:off x="640080" y="2052828"/>
+            <a:ext cx="10911535" cy="731520"/>
           </a:xfrm>
           <a:prstGeom prst="rect">
             <a:avLst/>
@@ -3532,7 +3532,7 @@
           <a:p>
             <a:pPr algn="ctr"/>
             <a:r>
-              <a:rPr sz="4400" b="1" i="0">
+              <a:rPr sz="4800" b="1" i="0">
                 <a:solidFill>
                   <a:srgbClr val="FFFFFF"/>
                 </a:solidFill>
@@ -3551,8 +3551,8 @@
         </p:nvSpPr>
         <p:spPr>
           <a:xfrm>
-            <a:off x="594360" y="2980944"/>
-            <a:ext cx="11002975" cy="347472"/>
+            <a:off x="640080" y="2985516"/>
+            <a:ext cx="10911535" cy="731520"/>
           </a:xfrm>
           <a:prstGeom prst="rect">
             <a:avLst/>
@@ -3567,13 +3567,13 @@
           <a:p>
             <a:pPr algn="ctr"/>
             <a:r>
-              <a:rPr sz="2200" b="0" i="1">
-                <a:solidFill>
-                  <a:srgbClr val="8C8C8C"/>
+              <a:rPr sz="4100" b="1" i="0">
+                <a:solidFill>
+                  <a:srgbClr val="FFFFFF"/>
                 </a:solidFill>
                 <a:latin typeface="Arial"/>
               </a:rPr>
-              <a:t/>
+              <a:t>Ó quão maravilhoso! Ó quão admirável!</a:t>
             </a:r>
           </a:p>
         </p:txBody>
@@ -3586,8 +3586,8 @@
         </p:nvSpPr>
         <p:spPr>
           <a:xfrm>
-            <a:off x="594360" y="3529584"/>
-            <a:ext cx="11002975" cy="685800"/>
+            <a:off x="640080" y="4128516"/>
+            <a:ext cx="10911535" cy="310896"/>
           </a:xfrm>
           <a:prstGeom prst="rect">
             <a:avLst/>
@@ -3602,13 +3602,13 @@
           <a:p>
             <a:pPr algn="ctr"/>
             <a:r>
-              <a:rPr sz="3805" b="1" i="0">
-                <a:solidFill>
-                  <a:srgbClr val="FFFFFF"/>
+              <a:rPr sz="2000" b="0" i="0">
+                <a:solidFill>
+                  <a:srgbClr val="828282"/>
                 </a:solidFill>
                 <a:latin typeface="Arial"/>
               </a:rPr>
-              <a:t>Ó quão maravilhoso! Ó quão admirável!</a:t>
+              <a:t>ああ歌い続けよう 主イエスの愛を</a:t>
             </a:r>
           </a:p>
         </p:txBody>
@@ -3621,8 +3621,8 @@
         </p:nvSpPr>
         <p:spPr>
           <a:xfrm>
-            <a:off x="594360" y="4251960"/>
-            <a:ext cx="11002975" cy="347472"/>
+            <a:off x="640080" y="4494276"/>
+            <a:ext cx="10911535" cy="310896"/>
           </a:xfrm>
           <a:prstGeom prst="rect">
             <a:avLst/>
@@ -3637,13 +3637,13 @@
           <a:p>
             <a:pPr algn="ctr"/>
             <a:r>
-              <a:rPr sz="2200" b="0" i="1">
-                <a:solidFill>
-                  <a:srgbClr val="8C8C8C"/>
+              <a:rPr sz="2000" b="0" i="0">
+                <a:solidFill>
+                  <a:srgbClr val="828282"/>
                 </a:solidFill>
                 <a:latin typeface="Arial"/>
               </a:rPr>
-              <a:t/>
+              <a:t>喜-び-歌おう すばらしい 主- の - あい</a:t>
             </a:r>
           </a:p>
         </p:txBody>
@@ -3682,8 +3682,8 @@
         </p:nvSpPr>
         <p:spPr>
           <a:xfrm>
-            <a:off x="594360" y="1837944"/>
-            <a:ext cx="11002975" cy="685800"/>
+            <a:off x="640080" y="1650492"/>
+            <a:ext cx="10911535" cy="731520"/>
           </a:xfrm>
           <a:prstGeom prst="rect">
             <a:avLst/>
@@ -3698,7 +3698,7 @@
           <a:p>
             <a:pPr algn="ctr"/>
             <a:r>
-              <a:rPr sz="4400" b="1" i="0">
+              <a:rPr sz="4800" b="1" i="0">
                 <a:solidFill>
                   <a:srgbClr val="FFFFFF"/>
                 </a:solidFill>
@@ -3717,8 +3717,8 @@
         </p:nvSpPr>
         <p:spPr>
           <a:xfrm>
-            <a:off x="594360" y="2560320"/>
-            <a:ext cx="11002975" cy="384048"/>
+            <a:off x="640080" y="2418588"/>
+            <a:ext cx="10911535" cy="365760"/>
           </a:xfrm>
           <a:prstGeom prst="rect">
             <a:avLst/>
@@ -3735,7 +3735,7 @@
             <a:r>
               <a:rPr sz="2400" b="0" i="1">
                 <a:solidFill>
-                  <a:srgbClr val="B4B4B4"/>
+                  <a:srgbClr val="AAAAAA"/>
                 </a:solidFill>
                 <a:latin typeface="Arial"/>
               </a:rPr>
@@ -3752,8 +3752,8 @@
         </p:nvSpPr>
         <p:spPr>
           <a:xfrm>
-            <a:off x="594360" y="2980944"/>
-            <a:ext cx="11002975" cy="347472"/>
+            <a:off x="640080" y="2985516"/>
+            <a:ext cx="10911535" cy="731520"/>
           </a:xfrm>
           <a:prstGeom prst="rect">
             <a:avLst/>
@@ -3768,13 +3768,13 @@
           <a:p>
             <a:pPr algn="ctr"/>
             <a:r>
-              <a:rPr sz="2000" b="0" i="1">
-                <a:solidFill>
-                  <a:srgbClr val="8C8C8C"/>
+              <a:rPr sz="4800" b="1" i="0">
+                <a:solidFill>
+                  <a:srgbClr val="FFFFFF"/>
                 </a:solidFill>
                 <a:latin typeface="Arial"/>
               </a:rPr>
-              <a:t/>
+              <a:t>十 字架の苦しみ 受けて死なれた</a:t>
             </a:r>
           </a:p>
         </p:txBody>
@@ -3787,8 +3787,8 @@
         </p:nvSpPr>
         <p:spPr>
           <a:xfrm>
-            <a:off x="594360" y="3529584"/>
-            <a:ext cx="11002975" cy="685800"/>
+            <a:off x="640080" y="3753612"/>
+            <a:ext cx="10911535" cy="365760"/>
           </a:xfrm>
           <a:prstGeom prst="rect">
             <a:avLst/>
@@ -3803,13 +3803,13 @@
           <a:p>
             <a:pPr algn="ctr"/>
             <a:r>
-              <a:rPr sz="4400" b="1" i="0">
-                <a:solidFill>
-                  <a:srgbClr val="FFFFFF"/>
+              <a:rPr sz="2400" b="0" i="1">
+                <a:solidFill>
+                  <a:srgbClr val="AAAAAA"/>
                 </a:solidFill>
                 <a:latin typeface="Arial"/>
               </a:rPr>
-              <a:t>十 字架の苦しみ 受けて死なれた</a:t>
+              <a:t>juujika no kurushimi ukete shinareta</a:t>
             </a:r>
           </a:p>
         </p:txBody>
@@ -3822,8 +3822,8 @@
         </p:nvSpPr>
         <p:spPr>
           <a:xfrm>
-            <a:off x="594360" y="4251960"/>
-            <a:ext cx="11002975" cy="384048"/>
+            <a:off x="640080" y="4530852"/>
+            <a:ext cx="10911535" cy="310896"/>
           </a:xfrm>
           <a:prstGeom prst="rect">
             <a:avLst/>
@@ -3838,13 +3838,13 @@
           <a:p>
             <a:pPr algn="ctr"/>
             <a:r>
-              <a:rPr sz="2400" b="0" i="1">
-                <a:solidFill>
-                  <a:srgbClr val="B4B4B4"/>
+              <a:rPr sz="2000" b="0" i="1">
+                <a:solidFill>
+                  <a:srgbClr val="828282"/>
                 </a:solidFill>
                 <a:latin typeface="Arial"/>
               </a:rPr>
-              <a:t>juujika no kurushimi ukete shinareta</a:t>
+              <a:t>De Jesus, o Nazareno</a:t>
             </a:r>
           </a:p>
         </p:txBody>
@@ -3857,8 +3857,8 @@
         </p:nvSpPr>
         <p:spPr>
           <a:xfrm>
-            <a:off x="594360" y="4672584"/>
-            <a:ext cx="11002975" cy="347472"/>
+            <a:off x="640080" y="4896612"/>
+            <a:ext cx="10911535" cy="310896"/>
           </a:xfrm>
           <a:prstGeom prst="rect">
             <a:avLst/>
@@ -3875,11 +3875,11 @@
             <a:r>
               <a:rPr sz="2000" b="0" i="1">
                 <a:solidFill>
-                  <a:srgbClr val="8C8C8C"/>
+                  <a:srgbClr val="828282"/>
                 </a:solidFill>
                 <a:latin typeface="Arial"/>
               </a:rPr>
-              <a:t/>
+              <a:t>E me pergunto como Ele poderia me amar</a:t>
             </a:r>
           </a:p>
         </p:txBody>
@@ -3918,8 +3918,8 @@
         </p:nvSpPr>
         <p:spPr>
           <a:xfrm>
-            <a:off x="594360" y="1837944"/>
-            <a:ext cx="11002975" cy="685800"/>
+            <a:off x="640080" y="1650492"/>
+            <a:ext cx="10911535" cy="731520"/>
           </a:xfrm>
           <a:prstGeom prst="rect">
             <a:avLst/>
@@ -3934,7 +3934,7 @@
           <a:p>
             <a:pPr algn="ctr"/>
             <a:r>
-              <a:rPr sz="4400" b="1" i="0">
+              <a:rPr sz="4800" b="1" i="0">
                 <a:solidFill>
                   <a:srgbClr val="FFFFFF"/>
                 </a:solidFill>
@@ -3953,8 +3953,8 @@
         </p:nvSpPr>
         <p:spPr>
           <a:xfrm>
-            <a:off x="594360" y="2560320"/>
-            <a:ext cx="11002975" cy="384048"/>
+            <a:off x="640080" y="2418588"/>
+            <a:ext cx="10911535" cy="365760"/>
           </a:xfrm>
           <a:prstGeom prst="rect">
             <a:avLst/>
@@ -3971,7 +3971,7 @@
             <a:r>
               <a:rPr sz="2400" b="0" i="1">
                 <a:solidFill>
-                  <a:srgbClr val="B4B4B4"/>
+                  <a:srgbClr val="AAAAAA"/>
                 </a:solidFill>
                 <a:latin typeface="Arial"/>
               </a:rPr>
@@ -3988,8 +3988,8 @@
         </p:nvSpPr>
         <p:spPr>
           <a:xfrm>
-            <a:off x="594360" y="2980944"/>
-            <a:ext cx="11002975" cy="347472"/>
+            <a:off x="640080" y="2985516"/>
+            <a:ext cx="10911535" cy="731520"/>
           </a:xfrm>
           <a:prstGeom prst="rect">
             <a:avLst/>
@@ -4004,13 +4004,13 @@
           <a:p>
             <a:pPr algn="ctr"/>
             <a:r>
-              <a:rPr sz="2000" b="0" i="1">
-                <a:solidFill>
-                  <a:srgbClr val="8C8C8C"/>
+              <a:rPr sz="4800" b="1" i="0">
+                <a:solidFill>
+                  <a:srgbClr val="FFFFFF"/>
                 </a:solidFill>
                 <a:latin typeface="Arial"/>
               </a:rPr>
-              <a:t/>
+              <a:t>喜-び-歌おう すばらしい 主- の - あい</a:t>
             </a:r>
           </a:p>
         </p:txBody>
@@ -4023,8 +4023,8 @@
         </p:nvSpPr>
         <p:spPr>
           <a:xfrm>
-            <a:off x="594360" y="3529584"/>
-            <a:ext cx="11002975" cy="685800"/>
+            <a:off x="640080" y="3753612"/>
+            <a:ext cx="10911535" cy="365760"/>
           </a:xfrm>
           <a:prstGeom prst="rect">
             <a:avLst/>
@@ -4039,13 +4039,13 @@
           <a:p>
             <a:pPr algn="ctr"/>
             <a:r>
-              <a:rPr sz="4400" b="1" i="0">
-                <a:solidFill>
-                  <a:srgbClr val="FFFFFF"/>
+              <a:rPr sz="2400" b="0" i="1">
+                <a:solidFill>
+                  <a:srgbClr val="AAAAAA"/>
                 </a:solidFill>
                 <a:latin typeface="Arial"/>
               </a:rPr>
-              <a:t>喜-び-歌おう すばらしい 主- の - あい</a:t>
+              <a:t>yorokobi utaou subarashii shu no ai</a:t>
             </a:r>
           </a:p>
         </p:txBody>
@@ -4058,8 +4058,8 @@
         </p:nvSpPr>
         <p:spPr>
           <a:xfrm>
-            <a:off x="594360" y="4251960"/>
-            <a:ext cx="11002975" cy="384048"/>
+            <a:off x="640080" y="4530852"/>
+            <a:ext cx="10911535" cy="310896"/>
           </a:xfrm>
           <a:prstGeom prst="rect">
             <a:avLst/>
@@ -4074,13 +4074,13 @@
           <a:p>
             <a:pPr algn="ctr"/>
             <a:r>
-              <a:rPr sz="2400" b="0" i="1">
-                <a:solidFill>
-                  <a:srgbClr val="B4B4B4"/>
+              <a:rPr sz="2000" b="0" i="1">
+                <a:solidFill>
+                  <a:srgbClr val="828282"/>
                 </a:solidFill>
                 <a:latin typeface="Arial"/>
               </a:rPr>
-              <a:t>yorokobi utaou subarashii shu no ai</a:t>
+              <a:t>Um pecador, condenado, imundo</a:t>
             </a:r>
           </a:p>
         </p:txBody>
@@ -4093,8 +4093,8 @@
         </p:nvSpPr>
         <p:spPr>
           <a:xfrm>
-            <a:off x="594360" y="4672584"/>
-            <a:ext cx="11002975" cy="347472"/>
+            <a:off x="640080" y="4896612"/>
+            <a:ext cx="10911535" cy="310896"/>
           </a:xfrm>
           <a:prstGeom prst="rect">
             <a:avLst/>
@@ -4111,11 +4111,11 @@
             <a:r>
               <a:rPr sz="2000" b="0" i="1">
                 <a:solidFill>
-                  <a:srgbClr val="8C8C8C"/>
+                  <a:srgbClr val="828282"/>
                 </a:solidFill>
                 <a:latin typeface="Arial"/>
               </a:rPr>
-              <a:t/>
+              <a:t>Ó quão maravilhoso! Ó quão admirável!</a:t>
             </a:r>
           </a:p>
         </p:txBody>
@@ -4154,8 +4154,8 @@
         </p:nvSpPr>
         <p:spPr>
           <a:xfrm>
-            <a:off x="594360" y="2258568"/>
-            <a:ext cx="11002975" cy="685800"/>
+            <a:off x="640080" y="2052828"/>
+            <a:ext cx="10911535" cy="731520"/>
           </a:xfrm>
           <a:prstGeom prst="rect">
             <a:avLst/>
@@ -4170,7 +4170,7 @@
           <a:p>
             <a:pPr algn="ctr"/>
             <a:r>
-              <a:rPr sz="4400" b="1" i="0">
+              <a:rPr sz="4800" b="1" i="0">
                 <a:solidFill>
                   <a:srgbClr val="FFFFFF"/>
                 </a:solidFill>
@@ -4189,8 +4189,8 @@
         </p:nvSpPr>
         <p:spPr>
           <a:xfrm>
-            <a:off x="594360" y="2980944"/>
-            <a:ext cx="11002975" cy="347472"/>
+            <a:off x="640080" y="2985516"/>
+            <a:ext cx="10911535" cy="731520"/>
           </a:xfrm>
           <a:prstGeom prst="rect">
             <a:avLst/>
@@ -4205,83 +4205,13 @@
           <a:p>
             <a:pPr algn="ctr"/>
             <a:r>
-              <a:rPr sz="2200" b="0" i="1">
-                <a:solidFill>
-                  <a:srgbClr val="8C8C8C"/>
-                </a:solidFill>
-                <a:latin typeface="Arial"/>
-              </a:rPr>
-              <a:t/>
-            </a:r>
-          </a:p>
-        </p:txBody>
-      </p:sp>
-      <p:sp>
-        <p:nvSpPr>
-          <p:cNvPr id="4" name="TextBox 3"/>
-          <p:cNvSpPr txBox="1"/>
-          <p:nvPr/>
-        </p:nvSpPr>
-        <p:spPr>
-          <a:xfrm>
-            <a:off x="594360" y="3529584"/>
-            <a:ext cx="11002975" cy="685800"/>
-          </a:xfrm>
-          <a:prstGeom prst="rect">
-            <a:avLst/>
-          </a:prstGeom>
-          <a:noFill/>
-        </p:spPr>
-        <p:txBody>
-          <a:bodyPr wrap="square">
-            <a:spAutoFit/>
-          </a:bodyPr>
-          <a:lstStyle/>
-          <a:p>
-            <a:pPr algn="ctr"/>
-            <a:r>
-              <a:rPr sz="4400" b="1" i="0">
+              <a:rPr sz="4800" b="1" i="0">
                 <a:solidFill>
                   <a:srgbClr val="FFFFFF"/>
                 </a:solidFill>
                 <a:latin typeface="Arial"/>
               </a:rPr>
               <a:t>Estou maravilhado com a presença</a:t>
-            </a:r>
-          </a:p>
-        </p:txBody>
-      </p:sp>
-      <p:sp>
-        <p:nvSpPr>
-          <p:cNvPr id="5" name="TextBox 4"/>
-          <p:cNvSpPr txBox="1"/>
-          <p:nvPr/>
-        </p:nvSpPr>
-        <p:spPr>
-          <a:xfrm>
-            <a:off x="594360" y="4251960"/>
-            <a:ext cx="11002975" cy="347472"/>
-          </a:xfrm>
-          <a:prstGeom prst="rect">
-            <a:avLst/>
-          </a:prstGeom>
-          <a:noFill/>
-        </p:spPr>
-        <p:txBody>
-          <a:bodyPr wrap="square">
-            <a:spAutoFit/>
-          </a:bodyPr>
-          <a:lstStyle/>
-          <a:p>
-            <a:pPr algn="ctr"/>
-            <a:r>
-              <a:rPr sz="2200" b="0" i="1">
-                <a:solidFill>
-                  <a:srgbClr val="8C8C8C"/>
-                </a:solidFill>
-                <a:latin typeface="Arial"/>
-              </a:rPr>
-              <a:t/>
             </a:r>
           </a:p>
         </p:txBody>
@@ -4320,8 +4250,8 @@
         </p:nvSpPr>
         <p:spPr>
           <a:xfrm>
-            <a:off x="594360" y="2258568"/>
-            <a:ext cx="11002975" cy="685800"/>
+            <a:off x="640080" y="2052828"/>
+            <a:ext cx="10911535" cy="731520"/>
           </a:xfrm>
           <a:prstGeom prst="rect">
             <a:avLst/>
@@ -4336,7 +4266,7 @@
           <a:p>
             <a:pPr algn="ctr"/>
             <a:r>
-              <a:rPr sz="4400" b="1" i="0">
+              <a:rPr sz="4800" b="1" i="0">
                 <a:solidFill>
                   <a:srgbClr val="FFFFFF"/>
                 </a:solidFill>
@@ -4355,8 +4285,8 @@
         </p:nvSpPr>
         <p:spPr>
           <a:xfrm>
-            <a:off x="594360" y="2980944"/>
-            <a:ext cx="11002975" cy="347472"/>
+            <a:off x="640080" y="2985516"/>
+            <a:ext cx="10911535" cy="731520"/>
           </a:xfrm>
           <a:prstGeom prst="rect">
             <a:avLst/>
@@ -4371,83 +4301,13 @@
           <a:p>
             <a:pPr algn="ctr"/>
             <a:r>
-              <a:rPr sz="2200" b="0" i="1">
-                <a:solidFill>
-                  <a:srgbClr val="8C8C8C"/>
-                </a:solidFill>
-                <a:latin typeface="Arial"/>
-              </a:rPr>
-              <a:t/>
-            </a:r>
-          </a:p>
-        </p:txBody>
-      </p:sp>
-      <p:sp>
-        <p:nvSpPr>
-          <p:cNvPr id="4" name="TextBox 3"/>
-          <p:cNvSpPr txBox="1"/>
-          <p:nvPr/>
-        </p:nvSpPr>
-        <p:spPr>
-          <a:xfrm>
-            <a:off x="594360" y="3529584"/>
-            <a:ext cx="11002975" cy="685800"/>
-          </a:xfrm>
-          <a:prstGeom prst="rect">
-            <a:avLst/>
-          </a:prstGeom>
-          <a:noFill/>
-        </p:spPr>
-        <p:txBody>
-          <a:bodyPr wrap="square">
-            <a:spAutoFit/>
-          </a:bodyPr>
-          <a:lstStyle/>
-          <a:p>
-            <a:pPr algn="ctr"/>
-            <a:r>
-              <a:rPr sz="3705" b="1" i="0">
+              <a:rPr sz="4000" b="1" i="0">
                 <a:solidFill>
                   <a:srgbClr val="FFFFFF"/>
                 </a:solidFill>
                 <a:latin typeface="Arial"/>
               </a:rPr>
               <a:t>E me pergunto como Ele poderia me amar</a:t>
-            </a:r>
-          </a:p>
-        </p:txBody>
-      </p:sp>
-      <p:sp>
-        <p:nvSpPr>
-          <p:cNvPr id="5" name="TextBox 4"/>
-          <p:cNvSpPr txBox="1"/>
-          <p:nvPr/>
-        </p:nvSpPr>
-        <p:spPr>
-          <a:xfrm>
-            <a:off x="594360" y="4251960"/>
-            <a:ext cx="11002975" cy="347472"/>
-          </a:xfrm>
-          <a:prstGeom prst="rect">
-            <a:avLst/>
-          </a:prstGeom>
-          <a:noFill/>
-        </p:spPr>
-        <p:txBody>
-          <a:bodyPr wrap="square">
-            <a:spAutoFit/>
-          </a:bodyPr>
-          <a:lstStyle/>
-          <a:p>
-            <a:pPr algn="ctr"/>
-            <a:r>
-              <a:rPr sz="2200" b="0" i="1">
-                <a:solidFill>
-                  <a:srgbClr val="8C8C8C"/>
-                </a:solidFill>
-                <a:latin typeface="Arial"/>
-              </a:rPr>
-              <a:t/>
             </a:r>
           </a:p>
         </p:txBody>
@@ -4486,8 +4346,8 @@
         </p:nvSpPr>
         <p:spPr>
           <a:xfrm>
-            <a:off x="594360" y="2258568"/>
-            <a:ext cx="11002975" cy="685800"/>
+            <a:off x="640080" y="2052828"/>
+            <a:ext cx="10911535" cy="731520"/>
           </a:xfrm>
           <a:prstGeom prst="rect">
             <a:avLst/>
@@ -4502,7 +4362,7 @@
           <a:p>
             <a:pPr algn="ctr"/>
             <a:r>
-              <a:rPr sz="4400" b="1" i="0">
+              <a:rPr sz="4800" b="1" i="0">
                 <a:solidFill>
                   <a:srgbClr val="FFFFFF"/>
                 </a:solidFill>
@@ -4521,8 +4381,8 @@
         </p:nvSpPr>
         <p:spPr>
           <a:xfrm>
-            <a:off x="594360" y="2980944"/>
-            <a:ext cx="11002975" cy="347472"/>
+            <a:off x="640080" y="2985516"/>
+            <a:ext cx="10911535" cy="731520"/>
           </a:xfrm>
           <a:prstGeom prst="rect">
             <a:avLst/>
@@ -4537,13 +4397,13 @@
           <a:p>
             <a:pPr algn="ctr"/>
             <a:r>
-              <a:rPr sz="2200" b="0" i="1">
-                <a:solidFill>
-                  <a:srgbClr val="8C8C8C"/>
+              <a:rPr sz="4100" b="1" i="0">
+                <a:solidFill>
+                  <a:srgbClr val="FFFFFF"/>
                 </a:solidFill>
                 <a:latin typeface="Arial"/>
               </a:rPr>
-              <a:t/>
+              <a:t>Ó quão maravilhoso! Ó quão admirável!</a:t>
             </a:r>
           </a:p>
         </p:txBody>
@@ -4556,8 +4416,8 @@
         </p:nvSpPr>
         <p:spPr>
           <a:xfrm>
-            <a:off x="594360" y="3529584"/>
-            <a:ext cx="11002975" cy="685800"/>
+            <a:off x="640080" y="4128516"/>
+            <a:ext cx="10911535" cy="310896"/>
           </a:xfrm>
           <a:prstGeom prst="rect">
             <a:avLst/>
@@ -4572,13 +4432,13 @@
           <a:p>
             <a:pPr algn="ctr"/>
             <a:r>
-              <a:rPr sz="3805" b="1" i="0">
-                <a:solidFill>
-                  <a:srgbClr val="FFFFFF"/>
+              <a:rPr sz="2000" b="0" i="0">
+                <a:solidFill>
+                  <a:srgbClr val="828282"/>
                 </a:solidFill>
                 <a:latin typeface="Arial"/>
               </a:rPr>
-              <a:t>Ó quão maravilhoso! Ó quão admirável!</a:t>
+              <a:t>ああ歌い続けよう 主イエスの愛を</a:t>
             </a:r>
           </a:p>
         </p:txBody>
@@ -4591,8 +4451,8 @@
         </p:nvSpPr>
         <p:spPr>
           <a:xfrm>
-            <a:off x="594360" y="4251960"/>
-            <a:ext cx="11002975" cy="347472"/>
+            <a:off x="640080" y="4494276"/>
+            <a:ext cx="10911535" cy="310896"/>
           </a:xfrm>
           <a:prstGeom prst="rect">
             <a:avLst/>
@@ -4607,13 +4467,13 @@
           <a:p>
             <a:pPr algn="ctr"/>
             <a:r>
-              <a:rPr sz="2200" b="0" i="1">
-                <a:solidFill>
-                  <a:srgbClr val="8C8C8C"/>
+              <a:rPr sz="2000" b="0" i="0">
+                <a:solidFill>
+                  <a:srgbClr val="828282"/>
                 </a:solidFill>
                 <a:latin typeface="Arial"/>
               </a:rPr>
-              <a:t/>
+              <a:t>喜-び-歌おう すばらしい 主- の - あい</a:t>
             </a:r>
           </a:p>
         </p:txBody>
@@ -4652,8 +4512,8 @@
         </p:nvSpPr>
         <p:spPr>
           <a:xfrm>
-            <a:off x="594360" y="2258568"/>
-            <a:ext cx="11002975" cy="685800"/>
+            <a:off x="640080" y="2052828"/>
+            <a:ext cx="10911535" cy="731520"/>
           </a:xfrm>
           <a:prstGeom prst="rect">
             <a:avLst/>
@@ -4668,7 +4528,7 @@
           <a:p>
             <a:pPr algn="ctr"/>
             <a:r>
-              <a:rPr sz="4400" b="1" i="0">
+              <a:rPr sz="4800" b="1" i="0">
                 <a:solidFill>
                   <a:srgbClr val="FFFFFF"/>
                 </a:solidFill>
@@ -4687,8 +4547,8 @@
         </p:nvSpPr>
         <p:spPr>
           <a:xfrm>
-            <a:off x="594360" y="2980944"/>
-            <a:ext cx="11002975" cy="347472"/>
+            <a:off x="640080" y="2985516"/>
+            <a:ext cx="10911535" cy="731520"/>
           </a:xfrm>
           <a:prstGeom prst="rect">
             <a:avLst/>
@@ -4703,13 +4563,13 @@
           <a:p>
             <a:pPr algn="ctr"/>
             <a:r>
-              <a:rPr sz="2200" b="0" i="1">
-                <a:solidFill>
-                  <a:srgbClr val="8C8C8C"/>
+              <a:rPr sz="4100" b="1" i="0">
+                <a:solidFill>
+                  <a:srgbClr val="FFFFFF"/>
                 </a:solidFill>
                 <a:latin typeface="Arial"/>
               </a:rPr>
-              <a:t/>
+              <a:t>Ó quão maravilhoso! Ó quão admirável!</a:t>
             </a:r>
           </a:p>
         </p:txBody>
@@ -4722,8 +4582,8 @@
         </p:nvSpPr>
         <p:spPr>
           <a:xfrm>
-            <a:off x="594360" y="3529584"/>
-            <a:ext cx="11002975" cy="685800"/>
+            <a:off x="640080" y="4128516"/>
+            <a:ext cx="10911535" cy="310896"/>
           </a:xfrm>
           <a:prstGeom prst="rect">
             <a:avLst/>
@@ -4738,13 +4598,13 @@
           <a:p>
             <a:pPr algn="ctr"/>
             <a:r>
-              <a:rPr sz="3805" b="1" i="0">
-                <a:solidFill>
-                  <a:srgbClr val="FFFFFF"/>
+              <a:rPr sz="2000" b="0" i="0">
+                <a:solidFill>
+                  <a:srgbClr val="828282"/>
                 </a:solidFill>
                 <a:latin typeface="Arial"/>
               </a:rPr>
-              <a:t>Ó quão maravilhoso! Ó quão admirável!</a:t>
+              <a:t>ああ歌い続けよう 主イエスの愛を</a:t>
             </a:r>
           </a:p>
         </p:txBody>
@@ -4757,8 +4617,8 @@
         </p:nvSpPr>
         <p:spPr>
           <a:xfrm>
-            <a:off x="594360" y="4251960"/>
-            <a:ext cx="11002975" cy="347472"/>
+            <a:off x="640080" y="4494276"/>
+            <a:ext cx="10911535" cy="310896"/>
           </a:xfrm>
           <a:prstGeom prst="rect">
             <a:avLst/>
@@ -4773,13 +4633,13 @@
           <a:p>
             <a:pPr algn="ctr"/>
             <a:r>
-              <a:rPr sz="2200" b="0" i="1">
-                <a:solidFill>
-                  <a:srgbClr val="8C8C8C"/>
+              <a:rPr sz="2000" b="0" i="0">
+                <a:solidFill>
+                  <a:srgbClr val="828282"/>
                 </a:solidFill>
                 <a:latin typeface="Arial"/>
               </a:rPr>
-              <a:t/>
+              <a:t>喜-び-歌おう すばらしい 主- の - あい</a:t>
             </a:r>
           </a:p>
         </p:txBody>
@@ -4818,8 +4678,8 @@
         </p:nvSpPr>
         <p:spPr>
           <a:xfrm>
-            <a:off x="594360" y="1837944"/>
-            <a:ext cx="11002975" cy="685800"/>
+            <a:off x="640080" y="1650492"/>
+            <a:ext cx="10911535" cy="731520"/>
           </a:xfrm>
           <a:prstGeom prst="rect">
             <a:avLst/>
@@ -4834,7 +4694,7 @@
           <a:p>
             <a:pPr algn="ctr"/>
             <a:r>
-              <a:rPr sz="4400" b="1" i="0">
+              <a:rPr sz="4800" b="1" i="0">
                 <a:solidFill>
                   <a:srgbClr val="FFFFFF"/>
                 </a:solidFill>
@@ -4853,8 +4713,8 @@
         </p:nvSpPr>
         <p:spPr>
           <a:xfrm>
-            <a:off x="594360" y="2560320"/>
-            <a:ext cx="11002975" cy="384048"/>
+            <a:off x="640080" y="2418588"/>
+            <a:ext cx="10911535" cy="365760"/>
           </a:xfrm>
           <a:prstGeom prst="rect">
             <a:avLst/>
@@ -4871,7 +4731,7 @@
             <a:r>
               <a:rPr sz="2400" b="0" i="1">
                 <a:solidFill>
-                  <a:srgbClr val="B4B4B4"/>
+                  <a:srgbClr val="AAAAAA"/>
                 </a:solidFill>
                 <a:latin typeface="Arial"/>
               </a:rPr>
@@ -4888,8 +4748,8 @@
         </p:nvSpPr>
         <p:spPr>
           <a:xfrm>
-            <a:off x="594360" y="2980944"/>
-            <a:ext cx="11002975" cy="347472"/>
+            <a:off x="640080" y="2985516"/>
+            <a:ext cx="10911535" cy="731520"/>
           </a:xfrm>
           <a:prstGeom prst="rect">
             <a:avLst/>
@@ -4904,13 +4764,13 @@
           <a:p>
             <a:pPr algn="ctr"/>
             <a:r>
-              <a:rPr sz="2000" b="0" i="1">
-                <a:solidFill>
-                  <a:srgbClr val="8C8C8C"/>
+              <a:rPr sz="4800" b="1" i="0">
+                <a:solidFill>
+                  <a:srgbClr val="FFFFFF"/>
                 </a:solidFill>
                 <a:latin typeface="Arial"/>
               </a:rPr>
-              <a:t/>
+              <a:t>とこしえの喜び 主の愛を歌-う</a:t>
             </a:r>
           </a:p>
         </p:txBody>
@@ -4923,8 +4783,8 @@
         </p:nvSpPr>
         <p:spPr>
           <a:xfrm>
-            <a:off x="594360" y="3529584"/>
-            <a:ext cx="11002975" cy="685800"/>
+            <a:off x="640080" y="3753612"/>
+            <a:ext cx="10911535" cy="365760"/>
           </a:xfrm>
           <a:prstGeom prst="rect">
             <a:avLst/>
@@ -4939,13 +4799,13 @@
           <a:p>
             <a:pPr algn="ctr"/>
             <a:r>
-              <a:rPr sz="4400" b="1" i="0">
-                <a:solidFill>
-                  <a:srgbClr val="FFFFFF"/>
+              <a:rPr sz="2400" b="0" i="1">
+                <a:solidFill>
+                  <a:srgbClr val="AAAAAA"/>
                 </a:solidFill>
                 <a:latin typeface="Arial"/>
               </a:rPr>
-              <a:t>とこしえの喜び 主の愛を歌-う</a:t>
+              <a:t>tokoshie no yorokobi shu no ai wo utau</a:t>
             </a:r>
           </a:p>
         </p:txBody>
@@ -4958,8 +4818,8 @@
         </p:nvSpPr>
         <p:spPr>
           <a:xfrm>
-            <a:off x="594360" y="4251960"/>
-            <a:ext cx="11002975" cy="384048"/>
+            <a:off x="640080" y="4530852"/>
+            <a:ext cx="10911535" cy="310896"/>
           </a:xfrm>
           <a:prstGeom prst="rect">
             <a:avLst/>
@@ -4974,13 +4834,13 @@
           <a:p>
             <a:pPr algn="ctr"/>
             <a:r>
-              <a:rPr sz="2400" b="0" i="1">
-                <a:solidFill>
-                  <a:srgbClr val="B4B4B4"/>
+              <a:rPr sz="2000" b="0" i="1">
+                <a:solidFill>
+                  <a:srgbClr val="828282"/>
                 </a:solidFill>
                 <a:latin typeface="Arial"/>
               </a:rPr>
-              <a:t>tokoshie no yorokobi shu no ai wo utau</a:t>
+              <a:t>Ó Quão Maravilhoso</a:t>
             </a:r>
           </a:p>
         </p:txBody>
@@ -4993,8 +4853,8 @@
         </p:nvSpPr>
         <p:spPr>
           <a:xfrm>
-            <a:off x="594360" y="4672584"/>
-            <a:ext cx="11002975" cy="347472"/>
+            <a:off x="640080" y="4896612"/>
+            <a:ext cx="10911535" cy="310896"/>
           </a:xfrm>
           <a:prstGeom prst="rect">
             <a:avLst/>
@@ -5011,11 +4871,11 @@
             <a:r>
               <a:rPr sz="2000" b="0" i="1">
                 <a:solidFill>
-                  <a:srgbClr val="8C8C8C"/>
+                  <a:srgbClr val="828282"/>
                 </a:solidFill>
                 <a:latin typeface="Arial"/>
               </a:rPr>
-              <a:t/>
+              <a:t>Estou maravilhado com a presença</a:t>
             </a:r>
           </a:p>
         </p:txBody>
@@ -5054,8 +4914,8 @@
         </p:nvSpPr>
         <p:spPr>
           <a:xfrm>
-            <a:off x="594360" y="1837944"/>
-            <a:ext cx="11002975" cy="685800"/>
+            <a:off x="640080" y="1650492"/>
+            <a:ext cx="10911535" cy="731520"/>
           </a:xfrm>
           <a:prstGeom prst="rect">
             <a:avLst/>
@@ -5070,7 +4930,7 @@
           <a:p>
             <a:pPr algn="ctr"/>
             <a:r>
-              <a:rPr sz="4400" b="1" i="0">
+              <a:rPr sz="4800" b="1" i="0">
                 <a:solidFill>
                   <a:srgbClr val="FFFFFF"/>
                 </a:solidFill>
@@ -5089,8 +4949,8 @@
         </p:nvSpPr>
         <p:spPr>
           <a:xfrm>
-            <a:off x="594360" y="2560320"/>
-            <a:ext cx="11002975" cy="384048"/>
+            <a:off x="640080" y="2418588"/>
+            <a:ext cx="10911535" cy="365760"/>
           </a:xfrm>
           <a:prstGeom prst="rect">
             <a:avLst/>
@@ -5107,7 +4967,7 @@
             <a:r>
               <a:rPr sz="2400" b="0" i="1">
                 <a:solidFill>
-                  <a:srgbClr val="B4B4B4"/>
+                  <a:srgbClr val="AAAAAA"/>
                 </a:solidFill>
                 <a:latin typeface="Arial"/>
               </a:rPr>
@@ -5124,8 +4984,8 @@
         </p:nvSpPr>
         <p:spPr>
           <a:xfrm>
-            <a:off x="594360" y="2980944"/>
-            <a:ext cx="11002975" cy="347472"/>
+            <a:off x="640080" y="2985516"/>
+            <a:ext cx="10911535" cy="731520"/>
           </a:xfrm>
           <a:prstGeom prst="rect">
             <a:avLst/>
@@ -5140,13 +5000,13 @@
           <a:p>
             <a:pPr algn="ctr"/>
             <a:r>
-              <a:rPr sz="2000" b="0" i="1">
-                <a:solidFill>
-                  <a:srgbClr val="8C8C8C"/>
+              <a:rPr sz="4800" b="1" i="0">
+                <a:solidFill>
+                  <a:srgbClr val="FFFFFF"/>
                 </a:solidFill>
                 <a:latin typeface="Arial"/>
               </a:rPr>
-              <a:t/>
+              <a:t>喜-び-歌おう すばらしい 主- の - あい</a:t>
             </a:r>
           </a:p>
         </p:txBody>
@@ -5159,8 +5019,8 @@
         </p:nvSpPr>
         <p:spPr>
           <a:xfrm>
-            <a:off x="594360" y="3529584"/>
-            <a:ext cx="11002975" cy="685800"/>
+            <a:off x="640080" y="3753612"/>
+            <a:ext cx="10911535" cy="365760"/>
           </a:xfrm>
           <a:prstGeom prst="rect">
             <a:avLst/>
@@ -5175,13 +5035,13 @@
           <a:p>
             <a:pPr algn="ctr"/>
             <a:r>
-              <a:rPr sz="4400" b="1" i="0">
-                <a:solidFill>
-                  <a:srgbClr val="FFFFFF"/>
+              <a:rPr sz="2400" b="0" i="1">
+                <a:solidFill>
+                  <a:srgbClr val="AAAAAA"/>
                 </a:solidFill>
                 <a:latin typeface="Arial"/>
               </a:rPr>
-              <a:t>喜-び-歌おう すばらしい 主- の - あい</a:t>
+              <a:t>yorokobi utaou subarashii shu no ai</a:t>
             </a:r>
           </a:p>
         </p:txBody>
@@ -5194,8 +5054,8 @@
         </p:nvSpPr>
         <p:spPr>
           <a:xfrm>
-            <a:off x="594360" y="4251960"/>
-            <a:ext cx="11002975" cy="384048"/>
+            <a:off x="640080" y="4530852"/>
+            <a:ext cx="10911535" cy="310896"/>
           </a:xfrm>
           <a:prstGeom prst="rect">
             <a:avLst/>
@@ -5210,13 +5070,13 @@
           <a:p>
             <a:pPr algn="ctr"/>
             <a:r>
-              <a:rPr sz="2400" b="0" i="1">
-                <a:solidFill>
-                  <a:srgbClr val="B4B4B4"/>
+              <a:rPr sz="2000" b="0" i="1">
+                <a:solidFill>
+                  <a:srgbClr val="828282"/>
                 </a:solidFill>
                 <a:latin typeface="Arial"/>
               </a:rPr>
-              <a:t>yorokobi utaou subarashii shu no ai</a:t>
+              <a:t>Um pecador, condenado, imundo</a:t>
             </a:r>
           </a:p>
         </p:txBody>
@@ -5229,8 +5089,8 @@
         </p:nvSpPr>
         <p:spPr>
           <a:xfrm>
-            <a:off x="594360" y="4672584"/>
-            <a:ext cx="11002975" cy="347472"/>
+            <a:off x="640080" y="4896612"/>
+            <a:ext cx="10911535" cy="310896"/>
           </a:xfrm>
           <a:prstGeom prst="rect">
             <a:avLst/>
@@ -5247,11 +5107,11 @@
             <a:r>
               <a:rPr sz="2000" b="0" i="1">
                 <a:solidFill>
-                  <a:srgbClr val="8C8C8C"/>
+                  <a:srgbClr val="828282"/>
                 </a:solidFill>
                 <a:latin typeface="Arial"/>
               </a:rPr>
-              <a:t/>
+              <a:t>Ó quão maravilhoso! Ó quão admirável!</a:t>
             </a:r>
           </a:p>
         </p:txBody>

--- a/output_pptx/I_Stand_Amazed_How_Marvelous.pptx
+++ b/output_pptx/I_Stand_Amazed_How_Marvelous.pptx
@@ -4216,6 +4216,76 @@
           </a:p>
         </p:txBody>
       </p:sp>
+      <p:sp>
+        <p:nvSpPr>
+          <p:cNvPr id="4" name="TextBox 3"/>
+          <p:cNvSpPr txBox="1"/>
+          <p:nvPr/>
+        </p:nvSpPr>
+        <p:spPr>
+          <a:xfrm>
+            <a:off x="640080" y="4128516"/>
+            <a:ext cx="10911535" cy="310896"/>
+          </a:xfrm>
+          <a:prstGeom prst="rect">
+            <a:avLst/>
+          </a:prstGeom>
+          <a:noFill/>
+        </p:spPr>
+        <p:txBody>
+          <a:bodyPr wrap="square">
+            <a:spAutoFit/>
+          </a:bodyPr>
+          <a:lstStyle/>
+          <a:p>
+            <a:pPr algn="ctr"/>
+            <a:r>
+              <a:rPr sz="2000" b="0" i="0">
+                <a:solidFill>
+                  <a:srgbClr val="828282"/>
+                </a:solidFill>
+                <a:latin typeface="Arial"/>
+              </a:rPr>
+              <a:t>ああ、なんと素晴らしい</a:t>
+            </a:r>
+          </a:p>
+        </p:txBody>
+      </p:sp>
+      <p:sp>
+        <p:nvSpPr>
+          <p:cNvPr id="5" name="TextBox 4"/>
+          <p:cNvSpPr txBox="1"/>
+          <p:nvPr/>
+        </p:nvSpPr>
+        <p:spPr>
+          <a:xfrm>
+            <a:off x="640080" y="4494276"/>
+            <a:ext cx="10911535" cy="310896"/>
+          </a:xfrm>
+          <a:prstGeom prst="rect">
+            <a:avLst/>
+          </a:prstGeom>
+          <a:noFill/>
+        </p:spPr>
+        <p:txBody>
+          <a:bodyPr wrap="square">
+            <a:spAutoFit/>
+          </a:bodyPr>
+          <a:lstStyle/>
+          <a:p>
+            <a:pPr algn="ctr"/>
+            <a:r>
+              <a:rPr sz="2000" b="0" i="0">
+                <a:solidFill>
+                  <a:srgbClr val="828282"/>
+                </a:solidFill>
+                <a:latin typeface="Arial"/>
+              </a:rPr>
+              <a:t>主の御presence に心を奪われています</a:t>
+            </a:r>
+          </a:p>
+        </p:txBody>
+      </p:sp>
     </p:spTree>
   </p:cSld>
   <p:clrMapOvr>
@@ -4308,6 +4378,76 @@
                 <a:latin typeface="Arial"/>
               </a:rPr>
               <a:t>E me pergunto como Ele poderia me amar</a:t>
+            </a:r>
+          </a:p>
+        </p:txBody>
+      </p:sp>
+      <p:sp>
+        <p:nvSpPr>
+          <p:cNvPr id="4" name="TextBox 3"/>
+          <p:cNvSpPr txBox="1"/>
+          <p:nvPr/>
+        </p:nvSpPr>
+        <p:spPr>
+          <a:xfrm>
+            <a:off x="640080" y="4128516"/>
+            <a:ext cx="10911535" cy="310896"/>
+          </a:xfrm>
+          <a:prstGeom prst="rect">
+            <a:avLst/>
+          </a:prstGeom>
+          <a:noFill/>
+        </p:spPr>
+        <p:txBody>
+          <a:bodyPr wrap="square">
+            <a:spAutoFit/>
+          </a:bodyPr>
+          <a:lstStyle/>
+          <a:p>
+            <a:pPr algn="ctr"/>
+            <a:r>
+              <a:rPr sz="2000" b="0" i="0">
+                <a:solidFill>
+                  <a:srgbClr val="828282"/>
+                </a:solidFill>
+                <a:latin typeface="Arial"/>
+              </a:rPr>
+              <a:t>ナザレのイエス</a:t>
+            </a:r>
+          </a:p>
+        </p:txBody>
+      </p:sp>
+      <p:sp>
+        <p:nvSpPr>
+          <p:cNvPr id="5" name="TextBox 4"/>
+          <p:cNvSpPr txBox="1"/>
+          <p:nvPr/>
+        </p:nvSpPr>
+        <p:spPr>
+          <a:xfrm>
+            <a:off x="640080" y="4494276"/>
+            <a:ext cx="10911535" cy="310896"/>
+          </a:xfrm>
+          <a:prstGeom prst="rect">
+            <a:avLst/>
+          </a:prstGeom>
+          <a:noFill/>
+        </p:spPr>
+        <p:txBody>
+          <a:bodyPr wrap="square">
+            <a:spAutoFit/>
+          </a:bodyPr>
+          <a:lstStyle/>
+          <a:p>
+            <a:pPr algn="ctr"/>
+            <a:r>
+              <a:rPr sz="2000" b="0" i="0">
+                <a:solidFill>
+                  <a:srgbClr val="828282"/>
+                </a:solidFill>
+                <a:latin typeface="Arial"/>
+              </a:rPr>
+              <a:t>そして、どうして彼が私を愛することができるのか不思議に思います</a:t>
             </a:r>
           </a:p>
         </p:txBody>
